--- a/Final/Figures/valleyexciton.pptx
+++ b/Final/Figures/valleyexciton.pptx
@@ -2,12 +2,12 @@
 <file path=ppt/presentation.xml><?xml version="1.0" encoding="utf-8"?>
 <p:presentation xmlns:a="http://schemas.openxmlformats.org/drawingml/2006/main" xmlns:r="http://schemas.openxmlformats.org/officeDocument/2006/relationships" xmlns:p="http://schemas.openxmlformats.org/presentationml/2006/main" saveSubsetFonts="1">
   <p:sldMasterIdLst>
-    <p:sldMasterId id="2147483696" r:id="rId1"/>
+    <p:sldMasterId id="2147483732" r:id="rId1"/>
   </p:sldMasterIdLst>
   <p:sldIdLst>
     <p:sldId id="256" r:id="rId2"/>
   </p:sldIdLst>
-  <p:sldSz cx="9539288" cy="2879725"/>
+  <p:sldSz cx="9906000" cy="3240088"/>
   <p:notesSz cx="6858000" cy="9144000"/>
   <p:defaultTextStyle>
     <a:defPPr>
@@ -104,6 +104,11 @@
       </a:defRPr>
     </a:lvl9pPr>
   </p:defaultTextStyle>
+  <p:extLst>
+    <p:ext uri="{EFAFB233-063F-42B5-8137-9DF3F51BA10A}">
+      <p15:sldGuideLst xmlns:p15="http://schemas.microsoft.com/office/powerpoint/2012/main"/>
+    </p:ext>
+  </p:extLst>
 </p:presentation>
 </file>
 
@@ -136,15 +141,15 @@
         </p:nvSpPr>
         <p:spPr>
           <a:xfrm>
-            <a:off x="1192413" y="471290"/>
-            <a:ext cx="7154467" cy="1002571"/>
+            <a:off x="1238250" y="530264"/>
+            <a:ext cx="7429500" cy="1128031"/>
           </a:xfrm>
         </p:spPr>
         <p:txBody>
           <a:bodyPr anchor="b"/>
           <a:lstStyle>
             <a:lvl1pPr algn="ctr">
-              <a:defRPr sz="2519"/>
+              <a:defRPr sz="2835"/>
             </a:lvl1pPr>
           </a:lstStyle>
           <a:p>
@@ -168,8 +173,8 @@
         </p:nvSpPr>
         <p:spPr>
           <a:xfrm>
-            <a:off x="1192413" y="1512523"/>
-            <a:ext cx="7154467" cy="695267"/>
+            <a:off x="1238250" y="1701796"/>
+            <a:ext cx="7429500" cy="782271"/>
           </a:xfrm>
         </p:spPr>
         <p:txBody>
@@ -177,39 +182,39 @@
           <a:lstStyle>
             <a:lvl1pPr marL="0" indent="0" algn="ctr">
               <a:buNone/>
-              <a:defRPr sz="1009"/>
+              <a:defRPr sz="1134"/>
             </a:lvl1pPr>
-            <a:lvl2pPr marL="191975" indent="0" algn="ctr">
-              <a:buNone/>
-              <a:defRPr sz="840"/>
+            <a:lvl2pPr marL="216027" indent="0" algn="ctr">
+              <a:buNone/>
+              <a:defRPr sz="945"/>
             </a:lvl2pPr>
-            <a:lvl3pPr marL="383953" indent="0" algn="ctr">
+            <a:lvl3pPr marL="432054" indent="0" algn="ctr">
+              <a:buNone/>
+              <a:defRPr sz="851"/>
+            </a:lvl3pPr>
+            <a:lvl4pPr marL="648081" indent="0" algn="ctr">
               <a:buNone/>
               <a:defRPr sz="756"/>
-            </a:lvl3pPr>
-            <a:lvl4pPr marL="575930" indent="0" algn="ctr">
-              <a:buNone/>
-              <a:defRPr sz="673"/>
             </a:lvl4pPr>
-            <a:lvl5pPr marL="767905" indent="0" algn="ctr">
-              <a:buNone/>
-              <a:defRPr sz="673"/>
+            <a:lvl5pPr marL="864108" indent="0" algn="ctr">
+              <a:buNone/>
+              <a:defRPr sz="756"/>
             </a:lvl5pPr>
-            <a:lvl6pPr marL="959882" indent="0" algn="ctr">
-              <a:buNone/>
-              <a:defRPr sz="673"/>
+            <a:lvl6pPr marL="1080135" indent="0" algn="ctr">
+              <a:buNone/>
+              <a:defRPr sz="756"/>
             </a:lvl6pPr>
-            <a:lvl7pPr marL="1151858" indent="0" algn="ctr">
-              <a:buNone/>
-              <a:defRPr sz="673"/>
+            <a:lvl7pPr marL="1296162" indent="0" algn="ctr">
+              <a:buNone/>
+              <a:defRPr sz="756"/>
             </a:lvl7pPr>
-            <a:lvl8pPr marL="1343835" indent="0" algn="ctr">
-              <a:buNone/>
-              <a:defRPr sz="673"/>
+            <a:lvl8pPr marL="1512189" indent="0" algn="ctr">
+              <a:buNone/>
+              <a:defRPr sz="756"/>
             </a:lvl8pPr>
-            <a:lvl9pPr marL="1535810" indent="0" algn="ctr">
-              <a:buNone/>
-              <a:defRPr sz="673"/>
+            <a:lvl9pPr marL="1728216" indent="0" algn="ctr">
+              <a:buNone/>
+              <a:defRPr sz="756"/>
             </a:lvl9pPr>
           </a:lstStyle>
           <a:p>
@@ -238,7 +243,7 @@
           <a:p>
             <a:fld id="{5978EC03-FC5A-4A91-8603-A2AAB6AAE5B1}" type="datetimeFigureOut">
               <a:rPr lang="zh-TW" altLang="en-US" smtClean="0"/>
-              <a:t>2026/4/20</a:t>
+              <a:t>2026/5/20</a:t>
             </a:fld>
             <a:endParaRPr lang="zh-TW" altLang="en-US"/>
           </a:p>
@@ -289,7 +294,7 @@
     </p:spTree>
     <p:extLst>
       <p:ext uri="{BB962C8B-B14F-4D97-AF65-F5344CB8AC3E}">
-        <p14:creationId xmlns:p14="http://schemas.microsoft.com/office/powerpoint/2010/main" val="676990688"/>
+        <p14:creationId xmlns:p14="http://schemas.microsoft.com/office/powerpoint/2010/main" val="3144416111"/>
       </p:ext>
     </p:extLst>
   </p:cSld>
@@ -408,7 +413,7 @@
           <a:p>
             <a:fld id="{5978EC03-FC5A-4A91-8603-A2AAB6AAE5B1}" type="datetimeFigureOut">
               <a:rPr lang="zh-TW" altLang="en-US" smtClean="0"/>
-              <a:t>2026/4/20</a:t>
+              <a:t>2026/5/20</a:t>
             </a:fld>
             <a:endParaRPr lang="zh-TW" altLang="en-US"/>
           </a:p>
@@ -459,7 +464,7 @@
     </p:spTree>
     <p:extLst>
       <p:ext uri="{BB962C8B-B14F-4D97-AF65-F5344CB8AC3E}">
-        <p14:creationId xmlns:p14="http://schemas.microsoft.com/office/powerpoint/2010/main" val="2345715095"/>
+        <p14:creationId xmlns:p14="http://schemas.microsoft.com/office/powerpoint/2010/main" val="3453958968"/>
       </p:ext>
     </p:extLst>
   </p:cSld>
@@ -498,8 +503,8 @@
         </p:nvSpPr>
         <p:spPr>
           <a:xfrm>
-            <a:off x="6826554" y="153319"/>
-            <a:ext cx="2056909" cy="2440434"/>
+            <a:off x="7088981" y="172505"/>
+            <a:ext cx="2135981" cy="2745825"/>
           </a:xfrm>
         </p:spPr>
         <p:txBody>
@@ -526,8 +531,8 @@
         </p:nvSpPr>
         <p:spPr>
           <a:xfrm>
-            <a:off x="655828" y="153319"/>
-            <a:ext cx="6051485" cy="2440434"/>
+            <a:off x="681037" y="172505"/>
+            <a:ext cx="6284119" cy="2745825"/>
           </a:xfrm>
         </p:spPr>
         <p:txBody>
@@ -588,7 +593,7 @@
           <a:p>
             <a:fld id="{5978EC03-FC5A-4A91-8603-A2AAB6AAE5B1}" type="datetimeFigureOut">
               <a:rPr lang="zh-TW" altLang="en-US" smtClean="0"/>
-              <a:t>2026/4/20</a:t>
+              <a:t>2026/5/20</a:t>
             </a:fld>
             <a:endParaRPr lang="zh-TW" altLang="en-US"/>
           </a:p>
@@ -639,7 +644,7 @@
     </p:spTree>
     <p:extLst>
       <p:ext uri="{BB962C8B-B14F-4D97-AF65-F5344CB8AC3E}">
-        <p14:creationId xmlns:p14="http://schemas.microsoft.com/office/powerpoint/2010/main" val="2390928629"/>
+        <p14:creationId xmlns:p14="http://schemas.microsoft.com/office/powerpoint/2010/main" val="3647715604"/>
       </p:ext>
     </p:extLst>
   </p:cSld>
@@ -758,7 +763,7 @@
           <a:p>
             <a:fld id="{5978EC03-FC5A-4A91-8603-A2AAB6AAE5B1}" type="datetimeFigureOut">
               <a:rPr lang="zh-TW" altLang="en-US" smtClean="0"/>
-              <a:t>2026/4/20</a:t>
+              <a:t>2026/5/20</a:t>
             </a:fld>
             <a:endParaRPr lang="zh-TW" altLang="en-US"/>
           </a:p>
@@ -809,7 +814,7 @@
     </p:spTree>
     <p:extLst>
       <p:ext uri="{BB962C8B-B14F-4D97-AF65-F5344CB8AC3E}">
-        <p14:creationId xmlns:p14="http://schemas.microsoft.com/office/powerpoint/2010/main" val="2246187693"/>
+        <p14:creationId xmlns:p14="http://schemas.microsoft.com/office/powerpoint/2010/main" val="2351905082"/>
       </p:ext>
     </p:extLst>
   </p:cSld>
@@ -848,15 +853,15 @@
         </p:nvSpPr>
         <p:spPr>
           <a:xfrm>
-            <a:off x="650859" y="717932"/>
-            <a:ext cx="8227636" cy="1197885"/>
+            <a:off x="675878" y="807773"/>
+            <a:ext cx="8543925" cy="1347786"/>
           </a:xfrm>
         </p:spPr>
         <p:txBody>
           <a:bodyPr anchor="b"/>
           <a:lstStyle>
             <a:lvl1pPr>
-              <a:defRPr sz="2519"/>
+              <a:defRPr sz="2835"/>
             </a:lvl1pPr>
           </a:lstStyle>
           <a:p>
@@ -880,8 +885,8 @@
         </p:nvSpPr>
         <p:spPr>
           <a:xfrm>
-            <a:off x="650859" y="1927150"/>
-            <a:ext cx="8227636" cy="629940"/>
+            <a:off x="675878" y="2168309"/>
+            <a:ext cx="8543925" cy="708769"/>
           </a:xfrm>
         </p:spPr>
         <p:txBody>
@@ -889,7 +894,7 @@
           <a:lstStyle>
             <a:lvl1pPr marL="0" indent="0">
               <a:buNone/>
-              <a:defRPr sz="1009">
+              <a:defRPr sz="1134">
                 <a:solidFill>
                   <a:schemeClr val="tx1">
                     <a:tint val="75000"/>
@@ -897,9 +902,9 @@
                 </a:solidFill>
               </a:defRPr>
             </a:lvl1pPr>
-            <a:lvl2pPr marL="191975" indent="0">
-              <a:buNone/>
-              <a:defRPr sz="840">
+            <a:lvl2pPr marL="216027" indent="0">
+              <a:buNone/>
+              <a:defRPr sz="945">
                 <a:solidFill>
                   <a:schemeClr val="tx1">
                     <a:tint val="75000"/>
@@ -907,7 +912,17 @@
                 </a:solidFill>
               </a:defRPr>
             </a:lvl2pPr>
-            <a:lvl3pPr marL="383953" indent="0">
+            <a:lvl3pPr marL="432054" indent="0">
+              <a:buNone/>
+              <a:defRPr sz="851">
+                <a:solidFill>
+                  <a:schemeClr val="tx1">
+                    <a:tint val="75000"/>
+                  </a:schemeClr>
+                </a:solidFill>
+              </a:defRPr>
+            </a:lvl3pPr>
+            <a:lvl4pPr marL="648081" indent="0">
               <a:buNone/>
               <a:defRPr sz="756">
                 <a:solidFill>
@@ -916,20 +931,10 @@
                   </a:schemeClr>
                 </a:solidFill>
               </a:defRPr>
-            </a:lvl3pPr>
-            <a:lvl4pPr marL="575930" indent="0">
-              <a:buNone/>
-              <a:defRPr sz="673">
-                <a:solidFill>
-                  <a:schemeClr val="tx1">
-                    <a:tint val="75000"/>
-                  </a:schemeClr>
-                </a:solidFill>
-              </a:defRPr>
             </a:lvl4pPr>
-            <a:lvl5pPr marL="767905" indent="0">
-              <a:buNone/>
-              <a:defRPr sz="673">
+            <a:lvl5pPr marL="864108" indent="0">
+              <a:buNone/>
+              <a:defRPr sz="756">
                 <a:solidFill>
                   <a:schemeClr val="tx1">
                     <a:tint val="75000"/>
@@ -937,9 +942,9 @@
                 </a:solidFill>
               </a:defRPr>
             </a:lvl5pPr>
-            <a:lvl6pPr marL="959882" indent="0">
-              <a:buNone/>
-              <a:defRPr sz="673">
+            <a:lvl6pPr marL="1080135" indent="0">
+              <a:buNone/>
+              <a:defRPr sz="756">
                 <a:solidFill>
                   <a:schemeClr val="tx1">
                     <a:tint val="75000"/>
@@ -947,9 +952,9 @@
                 </a:solidFill>
               </a:defRPr>
             </a:lvl6pPr>
-            <a:lvl7pPr marL="1151858" indent="0">
-              <a:buNone/>
-              <a:defRPr sz="673">
+            <a:lvl7pPr marL="1296162" indent="0">
+              <a:buNone/>
+              <a:defRPr sz="756">
                 <a:solidFill>
                   <a:schemeClr val="tx1">
                     <a:tint val="75000"/>
@@ -957,9 +962,9 @@
                 </a:solidFill>
               </a:defRPr>
             </a:lvl7pPr>
-            <a:lvl8pPr marL="1343835" indent="0">
-              <a:buNone/>
-              <a:defRPr sz="673">
+            <a:lvl8pPr marL="1512189" indent="0">
+              <a:buNone/>
+              <a:defRPr sz="756">
                 <a:solidFill>
                   <a:schemeClr val="tx1">
                     <a:tint val="75000"/>
@@ -967,9 +972,9 @@
                 </a:solidFill>
               </a:defRPr>
             </a:lvl8pPr>
-            <a:lvl9pPr marL="1535810" indent="0">
-              <a:buNone/>
-              <a:defRPr sz="673">
+            <a:lvl9pPr marL="1728216" indent="0">
+              <a:buNone/>
+              <a:defRPr sz="756">
                 <a:solidFill>
                   <a:schemeClr val="tx1">
                     <a:tint val="75000"/>
@@ -1004,7 +1009,7 @@
           <a:p>
             <a:fld id="{5978EC03-FC5A-4A91-8603-A2AAB6AAE5B1}" type="datetimeFigureOut">
               <a:rPr lang="zh-TW" altLang="en-US" smtClean="0"/>
-              <a:t>2026/4/20</a:t>
+              <a:t>2026/5/20</a:t>
             </a:fld>
             <a:endParaRPr lang="zh-TW" altLang="en-US"/>
           </a:p>
@@ -1055,7 +1060,7 @@
     </p:spTree>
     <p:extLst>
       <p:ext uri="{BB962C8B-B14F-4D97-AF65-F5344CB8AC3E}">
-        <p14:creationId xmlns:p14="http://schemas.microsoft.com/office/powerpoint/2010/main" val="3771938984"/>
+        <p14:creationId xmlns:p14="http://schemas.microsoft.com/office/powerpoint/2010/main" val="2984043878"/>
       </p:ext>
     </p:extLst>
   </p:cSld>
@@ -1117,8 +1122,8 @@
         </p:nvSpPr>
         <p:spPr>
           <a:xfrm>
-            <a:off x="655828" y="766594"/>
-            <a:ext cx="4054198" cy="1827159"/>
+            <a:off x="681038" y="862523"/>
+            <a:ext cx="4210050" cy="2055806"/>
           </a:xfrm>
         </p:spPr>
         <p:txBody>
@@ -1174,8 +1179,8 @@
         </p:nvSpPr>
         <p:spPr>
           <a:xfrm>
-            <a:off x="4829266" y="766594"/>
-            <a:ext cx="4054198" cy="1827159"/>
+            <a:off x="5014913" y="862523"/>
+            <a:ext cx="4210050" cy="2055806"/>
           </a:xfrm>
         </p:spPr>
         <p:txBody>
@@ -1236,7 +1241,7 @@
           <a:p>
             <a:fld id="{5978EC03-FC5A-4A91-8603-A2AAB6AAE5B1}" type="datetimeFigureOut">
               <a:rPr lang="zh-TW" altLang="en-US" smtClean="0"/>
-              <a:t>2026/4/20</a:t>
+              <a:t>2026/5/20</a:t>
             </a:fld>
             <a:endParaRPr lang="zh-TW" altLang="en-US"/>
           </a:p>
@@ -1287,7 +1292,7 @@
     </p:spTree>
     <p:extLst>
       <p:ext uri="{BB962C8B-B14F-4D97-AF65-F5344CB8AC3E}">
-        <p14:creationId xmlns:p14="http://schemas.microsoft.com/office/powerpoint/2010/main" val="3057564539"/>
+        <p14:creationId xmlns:p14="http://schemas.microsoft.com/office/powerpoint/2010/main" val="1622401252"/>
       </p:ext>
     </p:extLst>
   </p:cSld>
@@ -1326,8 +1331,8 @@
         </p:nvSpPr>
         <p:spPr>
           <a:xfrm>
-            <a:off x="657069" y="153319"/>
-            <a:ext cx="8227636" cy="556614"/>
+            <a:off x="682328" y="172505"/>
+            <a:ext cx="8543925" cy="626267"/>
           </a:xfrm>
         </p:spPr>
         <p:txBody>
@@ -1354,8 +1359,8 @@
         </p:nvSpPr>
         <p:spPr>
           <a:xfrm>
-            <a:off x="657068" y="705934"/>
-            <a:ext cx="4035566" cy="345967"/>
+            <a:off x="682328" y="794272"/>
+            <a:ext cx="4190702" cy="389260"/>
           </a:xfrm>
         </p:spPr>
         <p:txBody>
@@ -1363,39 +1368,39 @@
           <a:lstStyle>
             <a:lvl1pPr marL="0" indent="0">
               <a:buNone/>
-              <a:defRPr sz="1009" b="1"/>
+              <a:defRPr sz="1134" b="1"/>
             </a:lvl1pPr>
-            <a:lvl2pPr marL="191975" indent="0">
-              <a:buNone/>
-              <a:defRPr sz="840" b="1"/>
+            <a:lvl2pPr marL="216027" indent="0">
+              <a:buNone/>
+              <a:defRPr sz="945" b="1"/>
             </a:lvl2pPr>
-            <a:lvl3pPr marL="383953" indent="0">
+            <a:lvl3pPr marL="432054" indent="0">
+              <a:buNone/>
+              <a:defRPr sz="851" b="1"/>
+            </a:lvl3pPr>
+            <a:lvl4pPr marL="648081" indent="0">
               <a:buNone/>
               <a:defRPr sz="756" b="1"/>
-            </a:lvl3pPr>
-            <a:lvl4pPr marL="575930" indent="0">
-              <a:buNone/>
-              <a:defRPr sz="673" b="1"/>
             </a:lvl4pPr>
-            <a:lvl5pPr marL="767905" indent="0">
-              <a:buNone/>
-              <a:defRPr sz="673" b="1"/>
+            <a:lvl5pPr marL="864108" indent="0">
+              <a:buNone/>
+              <a:defRPr sz="756" b="1"/>
             </a:lvl5pPr>
-            <a:lvl6pPr marL="959882" indent="0">
-              <a:buNone/>
-              <a:defRPr sz="673" b="1"/>
+            <a:lvl6pPr marL="1080135" indent="0">
+              <a:buNone/>
+              <a:defRPr sz="756" b="1"/>
             </a:lvl6pPr>
-            <a:lvl7pPr marL="1151858" indent="0">
-              <a:buNone/>
-              <a:defRPr sz="673" b="1"/>
+            <a:lvl7pPr marL="1296162" indent="0">
+              <a:buNone/>
+              <a:defRPr sz="756" b="1"/>
             </a:lvl7pPr>
-            <a:lvl8pPr marL="1343835" indent="0">
-              <a:buNone/>
-              <a:defRPr sz="673" b="1"/>
+            <a:lvl8pPr marL="1512189" indent="0">
+              <a:buNone/>
+              <a:defRPr sz="756" b="1"/>
             </a:lvl8pPr>
-            <a:lvl9pPr marL="1535810" indent="0">
-              <a:buNone/>
-              <a:defRPr sz="673" b="1"/>
+            <a:lvl9pPr marL="1728216" indent="0">
+              <a:buNone/>
+              <a:defRPr sz="756" b="1"/>
             </a:lvl9pPr>
           </a:lstStyle>
           <a:p>
@@ -1419,8 +1424,8 @@
         </p:nvSpPr>
         <p:spPr>
           <a:xfrm>
-            <a:off x="657068" y="1051899"/>
-            <a:ext cx="4035566" cy="1547186"/>
+            <a:off x="682328" y="1183532"/>
+            <a:ext cx="4190702" cy="1740798"/>
           </a:xfrm>
         </p:spPr>
         <p:txBody>
@@ -1476,8 +1481,8 @@
         </p:nvSpPr>
         <p:spPr>
           <a:xfrm>
-            <a:off x="4829265" y="705934"/>
-            <a:ext cx="4055439" cy="345967"/>
+            <a:off x="5014913" y="794272"/>
+            <a:ext cx="4211340" cy="389260"/>
           </a:xfrm>
         </p:spPr>
         <p:txBody>
@@ -1485,39 +1490,39 @@
           <a:lstStyle>
             <a:lvl1pPr marL="0" indent="0">
               <a:buNone/>
-              <a:defRPr sz="1009" b="1"/>
+              <a:defRPr sz="1134" b="1"/>
             </a:lvl1pPr>
-            <a:lvl2pPr marL="191975" indent="0">
-              <a:buNone/>
-              <a:defRPr sz="840" b="1"/>
+            <a:lvl2pPr marL="216027" indent="0">
+              <a:buNone/>
+              <a:defRPr sz="945" b="1"/>
             </a:lvl2pPr>
-            <a:lvl3pPr marL="383953" indent="0">
+            <a:lvl3pPr marL="432054" indent="0">
+              <a:buNone/>
+              <a:defRPr sz="851" b="1"/>
+            </a:lvl3pPr>
+            <a:lvl4pPr marL="648081" indent="0">
               <a:buNone/>
               <a:defRPr sz="756" b="1"/>
-            </a:lvl3pPr>
-            <a:lvl4pPr marL="575930" indent="0">
-              <a:buNone/>
-              <a:defRPr sz="673" b="1"/>
             </a:lvl4pPr>
-            <a:lvl5pPr marL="767905" indent="0">
-              <a:buNone/>
-              <a:defRPr sz="673" b="1"/>
+            <a:lvl5pPr marL="864108" indent="0">
+              <a:buNone/>
+              <a:defRPr sz="756" b="1"/>
             </a:lvl5pPr>
-            <a:lvl6pPr marL="959882" indent="0">
-              <a:buNone/>
-              <a:defRPr sz="673" b="1"/>
+            <a:lvl6pPr marL="1080135" indent="0">
+              <a:buNone/>
+              <a:defRPr sz="756" b="1"/>
             </a:lvl6pPr>
-            <a:lvl7pPr marL="1151858" indent="0">
-              <a:buNone/>
-              <a:defRPr sz="673" b="1"/>
+            <a:lvl7pPr marL="1296162" indent="0">
+              <a:buNone/>
+              <a:defRPr sz="756" b="1"/>
             </a:lvl7pPr>
-            <a:lvl8pPr marL="1343835" indent="0">
-              <a:buNone/>
-              <a:defRPr sz="673" b="1"/>
+            <a:lvl8pPr marL="1512189" indent="0">
+              <a:buNone/>
+              <a:defRPr sz="756" b="1"/>
             </a:lvl8pPr>
-            <a:lvl9pPr marL="1535810" indent="0">
-              <a:buNone/>
-              <a:defRPr sz="673" b="1"/>
+            <a:lvl9pPr marL="1728216" indent="0">
+              <a:buNone/>
+              <a:defRPr sz="756" b="1"/>
             </a:lvl9pPr>
           </a:lstStyle>
           <a:p>
@@ -1541,8 +1546,8 @@
         </p:nvSpPr>
         <p:spPr>
           <a:xfrm>
-            <a:off x="4829265" y="1051899"/>
-            <a:ext cx="4055439" cy="1547186"/>
+            <a:off x="5014913" y="1183532"/>
+            <a:ext cx="4211340" cy="1740798"/>
           </a:xfrm>
         </p:spPr>
         <p:txBody>
@@ -1603,7 +1608,7 @@
           <a:p>
             <a:fld id="{5978EC03-FC5A-4A91-8603-A2AAB6AAE5B1}" type="datetimeFigureOut">
               <a:rPr lang="zh-TW" altLang="en-US" smtClean="0"/>
-              <a:t>2026/4/20</a:t>
+              <a:t>2026/5/20</a:t>
             </a:fld>
             <a:endParaRPr lang="zh-TW" altLang="en-US"/>
           </a:p>
@@ -1654,7 +1659,7 @@
     </p:spTree>
     <p:extLst>
       <p:ext uri="{BB962C8B-B14F-4D97-AF65-F5344CB8AC3E}">
-        <p14:creationId xmlns:p14="http://schemas.microsoft.com/office/powerpoint/2010/main" val="3583385576"/>
+        <p14:creationId xmlns:p14="http://schemas.microsoft.com/office/powerpoint/2010/main" val="1239985716"/>
       </p:ext>
     </p:extLst>
   </p:cSld>
@@ -1721,7 +1726,7 @@
           <a:p>
             <a:fld id="{5978EC03-FC5A-4A91-8603-A2AAB6AAE5B1}" type="datetimeFigureOut">
               <a:rPr lang="zh-TW" altLang="en-US" smtClean="0"/>
-              <a:t>2026/4/20</a:t>
+              <a:t>2026/5/20</a:t>
             </a:fld>
             <a:endParaRPr lang="zh-TW" altLang="en-US"/>
           </a:p>
@@ -1772,7 +1777,7 @@
     </p:spTree>
     <p:extLst>
       <p:ext uri="{BB962C8B-B14F-4D97-AF65-F5344CB8AC3E}">
-        <p14:creationId xmlns:p14="http://schemas.microsoft.com/office/powerpoint/2010/main" val="459093506"/>
+        <p14:creationId xmlns:p14="http://schemas.microsoft.com/office/powerpoint/2010/main" val="131175009"/>
       </p:ext>
     </p:extLst>
   </p:cSld>
@@ -1816,7 +1821,7 @@
           <a:p>
             <a:fld id="{5978EC03-FC5A-4A91-8603-A2AAB6AAE5B1}" type="datetimeFigureOut">
               <a:rPr lang="zh-TW" altLang="en-US" smtClean="0"/>
-              <a:t>2026/4/20</a:t>
+              <a:t>2026/5/20</a:t>
             </a:fld>
             <a:endParaRPr lang="zh-TW" altLang="en-US"/>
           </a:p>
@@ -1867,7 +1872,7 @@
     </p:spTree>
     <p:extLst>
       <p:ext uri="{BB962C8B-B14F-4D97-AF65-F5344CB8AC3E}">
-        <p14:creationId xmlns:p14="http://schemas.microsoft.com/office/powerpoint/2010/main" val="853303118"/>
+        <p14:creationId xmlns:p14="http://schemas.microsoft.com/office/powerpoint/2010/main" val="652643415"/>
       </p:ext>
     </p:extLst>
   </p:cSld>
@@ -1906,15 +1911,15 @@
         </p:nvSpPr>
         <p:spPr>
           <a:xfrm>
-            <a:off x="657071" y="191982"/>
-            <a:ext cx="3076667" cy="671936"/>
+            <a:off x="682328" y="216006"/>
+            <a:ext cx="3194943" cy="756021"/>
           </a:xfrm>
         </p:spPr>
         <p:txBody>
           <a:bodyPr anchor="b"/>
           <a:lstStyle>
             <a:lvl1pPr>
-              <a:defRPr sz="1343"/>
+              <a:defRPr sz="1512"/>
             </a:lvl1pPr>
           </a:lstStyle>
           <a:p>
@@ -1938,39 +1943,39 @@
         </p:nvSpPr>
         <p:spPr>
           <a:xfrm>
-            <a:off x="4055442" y="414628"/>
-            <a:ext cx="4829265" cy="2046471"/>
+            <a:off x="4211340" y="466513"/>
+            <a:ext cx="5014913" cy="2302563"/>
           </a:xfrm>
         </p:spPr>
         <p:txBody>
           <a:bodyPr/>
           <a:lstStyle>
             <a:lvl1pPr>
-              <a:defRPr sz="1343"/>
+              <a:defRPr sz="1512"/>
             </a:lvl1pPr>
             <a:lvl2pPr>
-              <a:defRPr sz="1176"/>
+              <a:defRPr sz="1323"/>
             </a:lvl2pPr>
             <a:lvl3pPr>
-              <a:defRPr sz="1009"/>
+              <a:defRPr sz="1134"/>
             </a:lvl3pPr>
             <a:lvl4pPr>
-              <a:defRPr sz="840"/>
+              <a:defRPr sz="945"/>
             </a:lvl4pPr>
             <a:lvl5pPr>
-              <a:defRPr sz="840"/>
+              <a:defRPr sz="945"/>
             </a:lvl5pPr>
             <a:lvl6pPr>
-              <a:defRPr sz="840"/>
+              <a:defRPr sz="945"/>
             </a:lvl6pPr>
             <a:lvl7pPr>
-              <a:defRPr sz="840"/>
+              <a:defRPr sz="945"/>
             </a:lvl7pPr>
             <a:lvl8pPr>
-              <a:defRPr sz="840"/>
+              <a:defRPr sz="945"/>
             </a:lvl8pPr>
             <a:lvl9pPr>
-              <a:defRPr sz="840"/>
+              <a:defRPr sz="945"/>
             </a:lvl9pPr>
           </a:lstStyle>
           <a:p>
@@ -2023,8 +2028,8 @@
         </p:nvSpPr>
         <p:spPr>
           <a:xfrm>
-            <a:off x="657071" y="863918"/>
-            <a:ext cx="3076667" cy="1600514"/>
+            <a:off x="682328" y="972026"/>
+            <a:ext cx="3194943" cy="1800799"/>
           </a:xfrm>
         </p:spPr>
         <p:txBody>
@@ -2032,39 +2037,39 @@
           <a:lstStyle>
             <a:lvl1pPr marL="0" indent="0">
               <a:buNone/>
-              <a:defRPr sz="673"/>
+              <a:defRPr sz="756"/>
             </a:lvl1pPr>
-            <a:lvl2pPr marL="191975" indent="0">
-              <a:buNone/>
-              <a:defRPr sz="587"/>
+            <a:lvl2pPr marL="216027" indent="0">
+              <a:buNone/>
+              <a:defRPr sz="662"/>
             </a:lvl2pPr>
-            <a:lvl3pPr marL="383953" indent="0">
-              <a:buNone/>
-              <a:defRPr sz="503"/>
+            <a:lvl3pPr marL="432054" indent="0">
+              <a:buNone/>
+              <a:defRPr sz="567"/>
             </a:lvl3pPr>
-            <a:lvl4pPr marL="575930" indent="0">
-              <a:buNone/>
-              <a:defRPr sz="420"/>
+            <a:lvl4pPr marL="648081" indent="0">
+              <a:buNone/>
+              <a:defRPr sz="472"/>
             </a:lvl4pPr>
-            <a:lvl5pPr marL="767905" indent="0">
-              <a:buNone/>
-              <a:defRPr sz="420"/>
+            <a:lvl5pPr marL="864108" indent="0">
+              <a:buNone/>
+              <a:defRPr sz="472"/>
             </a:lvl5pPr>
-            <a:lvl6pPr marL="959882" indent="0">
-              <a:buNone/>
-              <a:defRPr sz="420"/>
+            <a:lvl6pPr marL="1080135" indent="0">
+              <a:buNone/>
+              <a:defRPr sz="472"/>
             </a:lvl6pPr>
-            <a:lvl7pPr marL="1151858" indent="0">
-              <a:buNone/>
-              <a:defRPr sz="420"/>
+            <a:lvl7pPr marL="1296162" indent="0">
+              <a:buNone/>
+              <a:defRPr sz="472"/>
             </a:lvl7pPr>
-            <a:lvl8pPr marL="1343835" indent="0">
-              <a:buNone/>
-              <a:defRPr sz="420"/>
+            <a:lvl8pPr marL="1512189" indent="0">
+              <a:buNone/>
+              <a:defRPr sz="472"/>
             </a:lvl8pPr>
-            <a:lvl9pPr marL="1535810" indent="0">
-              <a:buNone/>
-              <a:defRPr sz="420"/>
+            <a:lvl9pPr marL="1728216" indent="0">
+              <a:buNone/>
+              <a:defRPr sz="472"/>
             </a:lvl9pPr>
           </a:lstStyle>
           <a:p>
@@ -2093,7 +2098,7 @@
           <a:p>
             <a:fld id="{5978EC03-FC5A-4A91-8603-A2AAB6AAE5B1}" type="datetimeFigureOut">
               <a:rPr lang="zh-TW" altLang="en-US" smtClean="0"/>
-              <a:t>2026/4/20</a:t>
+              <a:t>2026/5/20</a:t>
             </a:fld>
             <a:endParaRPr lang="zh-TW" altLang="en-US"/>
           </a:p>
@@ -2144,7 +2149,7 @@
     </p:spTree>
     <p:extLst>
       <p:ext uri="{BB962C8B-B14F-4D97-AF65-F5344CB8AC3E}">
-        <p14:creationId xmlns:p14="http://schemas.microsoft.com/office/powerpoint/2010/main" val="942688622"/>
+        <p14:creationId xmlns:p14="http://schemas.microsoft.com/office/powerpoint/2010/main" val="1464370221"/>
       </p:ext>
     </p:extLst>
   </p:cSld>
@@ -2183,15 +2188,15 @@
         </p:nvSpPr>
         <p:spPr>
           <a:xfrm>
-            <a:off x="657071" y="191982"/>
-            <a:ext cx="3076667" cy="671936"/>
+            <a:off x="682328" y="216006"/>
+            <a:ext cx="3194943" cy="756021"/>
           </a:xfrm>
         </p:spPr>
         <p:txBody>
           <a:bodyPr anchor="b"/>
           <a:lstStyle>
             <a:lvl1pPr>
-              <a:defRPr sz="1343"/>
+              <a:defRPr sz="1512"/>
             </a:lvl1pPr>
           </a:lstStyle>
           <a:p>
@@ -2215,8 +2220,8 @@
         </p:nvSpPr>
         <p:spPr>
           <a:xfrm>
-            <a:off x="4055442" y="414628"/>
-            <a:ext cx="4829265" cy="2046471"/>
+            <a:off x="4211340" y="466513"/>
+            <a:ext cx="5014913" cy="2302563"/>
           </a:xfrm>
         </p:spPr>
         <p:txBody>
@@ -2224,39 +2229,39 @@
           <a:lstStyle>
             <a:lvl1pPr marL="0" indent="0">
               <a:buNone/>
-              <a:defRPr sz="1343"/>
+              <a:defRPr sz="1512"/>
             </a:lvl1pPr>
-            <a:lvl2pPr marL="191975" indent="0">
-              <a:buNone/>
-              <a:defRPr sz="1176"/>
+            <a:lvl2pPr marL="216027" indent="0">
+              <a:buNone/>
+              <a:defRPr sz="1323"/>
             </a:lvl2pPr>
-            <a:lvl3pPr marL="383953" indent="0">
-              <a:buNone/>
-              <a:defRPr sz="1009"/>
+            <a:lvl3pPr marL="432054" indent="0">
+              <a:buNone/>
+              <a:defRPr sz="1134"/>
             </a:lvl3pPr>
-            <a:lvl4pPr marL="575930" indent="0">
-              <a:buNone/>
-              <a:defRPr sz="840"/>
+            <a:lvl4pPr marL="648081" indent="0">
+              <a:buNone/>
+              <a:defRPr sz="945"/>
             </a:lvl4pPr>
-            <a:lvl5pPr marL="767905" indent="0">
-              <a:buNone/>
-              <a:defRPr sz="840"/>
+            <a:lvl5pPr marL="864108" indent="0">
+              <a:buNone/>
+              <a:defRPr sz="945"/>
             </a:lvl5pPr>
-            <a:lvl6pPr marL="959882" indent="0">
-              <a:buNone/>
-              <a:defRPr sz="840"/>
+            <a:lvl6pPr marL="1080135" indent="0">
+              <a:buNone/>
+              <a:defRPr sz="945"/>
             </a:lvl6pPr>
-            <a:lvl7pPr marL="1151858" indent="0">
-              <a:buNone/>
-              <a:defRPr sz="840"/>
+            <a:lvl7pPr marL="1296162" indent="0">
+              <a:buNone/>
+              <a:defRPr sz="945"/>
             </a:lvl7pPr>
-            <a:lvl8pPr marL="1343835" indent="0">
-              <a:buNone/>
-              <a:defRPr sz="840"/>
+            <a:lvl8pPr marL="1512189" indent="0">
+              <a:buNone/>
+              <a:defRPr sz="945"/>
             </a:lvl8pPr>
-            <a:lvl9pPr marL="1535810" indent="0">
-              <a:buNone/>
-              <a:defRPr sz="840"/>
+            <a:lvl9pPr marL="1728216" indent="0">
+              <a:buNone/>
+              <a:defRPr sz="945"/>
             </a:lvl9pPr>
           </a:lstStyle>
           <a:p>
@@ -2280,8 +2285,8 @@
         </p:nvSpPr>
         <p:spPr>
           <a:xfrm>
-            <a:off x="657071" y="863918"/>
-            <a:ext cx="3076667" cy="1600514"/>
+            <a:off x="682328" y="972026"/>
+            <a:ext cx="3194943" cy="1800799"/>
           </a:xfrm>
         </p:spPr>
         <p:txBody>
@@ -2289,39 +2294,39 @@
           <a:lstStyle>
             <a:lvl1pPr marL="0" indent="0">
               <a:buNone/>
-              <a:defRPr sz="673"/>
+              <a:defRPr sz="756"/>
             </a:lvl1pPr>
-            <a:lvl2pPr marL="191975" indent="0">
-              <a:buNone/>
-              <a:defRPr sz="587"/>
+            <a:lvl2pPr marL="216027" indent="0">
+              <a:buNone/>
+              <a:defRPr sz="662"/>
             </a:lvl2pPr>
-            <a:lvl3pPr marL="383953" indent="0">
-              <a:buNone/>
-              <a:defRPr sz="503"/>
+            <a:lvl3pPr marL="432054" indent="0">
+              <a:buNone/>
+              <a:defRPr sz="567"/>
             </a:lvl3pPr>
-            <a:lvl4pPr marL="575930" indent="0">
-              <a:buNone/>
-              <a:defRPr sz="420"/>
+            <a:lvl4pPr marL="648081" indent="0">
+              <a:buNone/>
+              <a:defRPr sz="472"/>
             </a:lvl4pPr>
-            <a:lvl5pPr marL="767905" indent="0">
-              <a:buNone/>
-              <a:defRPr sz="420"/>
+            <a:lvl5pPr marL="864108" indent="0">
+              <a:buNone/>
+              <a:defRPr sz="472"/>
             </a:lvl5pPr>
-            <a:lvl6pPr marL="959882" indent="0">
-              <a:buNone/>
-              <a:defRPr sz="420"/>
+            <a:lvl6pPr marL="1080135" indent="0">
+              <a:buNone/>
+              <a:defRPr sz="472"/>
             </a:lvl6pPr>
-            <a:lvl7pPr marL="1151858" indent="0">
-              <a:buNone/>
-              <a:defRPr sz="420"/>
+            <a:lvl7pPr marL="1296162" indent="0">
+              <a:buNone/>
+              <a:defRPr sz="472"/>
             </a:lvl7pPr>
-            <a:lvl8pPr marL="1343835" indent="0">
-              <a:buNone/>
-              <a:defRPr sz="420"/>
+            <a:lvl8pPr marL="1512189" indent="0">
+              <a:buNone/>
+              <a:defRPr sz="472"/>
             </a:lvl8pPr>
-            <a:lvl9pPr marL="1535810" indent="0">
-              <a:buNone/>
-              <a:defRPr sz="420"/>
+            <a:lvl9pPr marL="1728216" indent="0">
+              <a:buNone/>
+              <a:defRPr sz="472"/>
             </a:lvl9pPr>
           </a:lstStyle>
           <a:p>
@@ -2350,7 +2355,7 @@
           <a:p>
             <a:fld id="{5978EC03-FC5A-4A91-8603-A2AAB6AAE5B1}" type="datetimeFigureOut">
               <a:rPr lang="zh-TW" altLang="en-US" smtClean="0"/>
-              <a:t>2026/4/20</a:t>
+              <a:t>2026/5/20</a:t>
             </a:fld>
             <a:endParaRPr lang="zh-TW" altLang="en-US"/>
           </a:p>
@@ -2401,7 +2406,7 @@
     </p:spTree>
     <p:extLst>
       <p:ext uri="{BB962C8B-B14F-4D97-AF65-F5344CB8AC3E}">
-        <p14:creationId xmlns:p14="http://schemas.microsoft.com/office/powerpoint/2010/main" val="2192404927"/>
+        <p14:creationId xmlns:p14="http://schemas.microsoft.com/office/powerpoint/2010/main" val="3584505082"/>
       </p:ext>
     </p:extLst>
   </p:cSld>
@@ -2445,8 +2450,8 @@
         </p:nvSpPr>
         <p:spPr>
           <a:xfrm>
-            <a:off x="655828" y="153319"/>
-            <a:ext cx="8227636" cy="556614"/>
+            <a:off x="681038" y="172505"/>
+            <a:ext cx="8543925" cy="626267"/>
           </a:xfrm>
           <a:prstGeom prst="rect">
             <a:avLst/>
@@ -2478,8 +2483,8 @@
         </p:nvSpPr>
         <p:spPr>
           <a:xfrm>
-            <a:off x="655828" y="766594"/>
-            <a:ext cx="8227636" cy="1827159"/>
+            <a:off x="681038" y="862523"/>
+            <a:ext cx="8543925" cy="2055806"/>
           </a:xfrm>
           <a:prstGeom prst="rect">
             <a:avLst/>
@@ -2540,8 +2545,8 @@
         </p:nvSpPr>
         <p:spPr>
           <a:xfrm>
-            <a:off x="655826" y="2669080"/>
-            <a:ext cx="2146340" cy="153319"/>
+            <a:off x="681038" y="3003082"/>
+            <a:ext cx="2228850" cy="172505"/>
           </a:xfrm>
           <a:prstGeom prst="rect">
             <a:avLst/>
@@ -2551,7 +2556,7 @@
           <a:bodyPr vert="horz" lIns="91440" tIns="45720" rIns="91440" bIns="45720" rtlCol="0" anchor="ctr"/>
           <a:lstStyle>
             <a:lvl1pPr algn="l">
-              <a:defRPr sz="503">
+              <a:defRPr sz="567">
                 <a:solidFill>
                   <a:schemeClr val="tx1">
                     <a:tint val="75000"/>
@@ -2563,7 +2568,7 @@
           <a:p>
             <a:fld id="{5978EC03-FC5A-4A91-8603-A2AAB6AAE5B1}" type="datetimeFigureOut">
               <a:rPr lang="zh-TW" altLang="en-US" smtClean="0"/>
-              <a:t>2026/4/20</a:t>
+              <a:t>2026/5/20</a:t>
             </a:fld>
             <a:endParaRPr lang="zh-TW" altLang="en-US"/>
           </a:p>
@@ -2581,8 +2586,8 @@
         </p:nvSpPr>
         <p:spPr>
           <a:xfrm>
-            <a:off x="3159892" y="2669080"/>
-            <a:ext cx="3219509" cy="153319"/>
+            <a:off x="3281363" y="3003082"/>
+            <a:ext cx="3343275" cy="172505"/>
           </a:xfrm>
           <a:prstGeom prst="rect">
             <a:avLst/>
@@ -2592,7 +2597,7 @@
           <a:bodyPr vert="horz" lIns="91440" tIns="45720" rIns="91440" bIns="45720" rtlCol="0" anchor="ctr"/>
           <a:lstStyle>
             <a:lvl1pPr algn="ctr">
-              <a:defRPr sz="503">
+              <a:defRPr sz="567">
                 <a:solidFill>
                   <a:schemeClr val="tx1">
                     <a:tint val="75000"/>
@@ -2618,8 +2623,8 @@
         </p:nvSpPr>
         <p:spPr>
           <a:xfrm>
-            <a:off x="6737124" y="2669080"/>
-            <a:ext cx="2146340" cy="153319"/>
+            <a:off x="6996113" y="3003082"/>
+            <a:ext cx="2228850" cy="172505"/>
           </a:xfrm>
           <a:prstGeom prst="rect">
             <a:avLst/>
@@ -2629,7 +2634,7 @@
           <a:bodyPr vert="horz" lIns="91440" tIns="45720" rIns="91440" bIns="45720" rtlCol="0" anchor="ctr"/>
           <a:lstStyle>
             <a:lvl1pPr algn="r">
-              <a:defRPr sz="503">
+              <a:defRPr sz="567">
                 <a:solidFill>
                   <a:schemeClr val="tx1">
                     <a:tint val="75000"/>
@@ -2650,27 +2655,27 @@
     </p:spTree>
     <p:extLst>
       <p:ext uri="{BB962C8B-B14F-4D97-AF65-F5344CB8AC3E}">
-        <p14:creationId xmlns:p14="http://schemas.microsoft.com/office/powerpoint/2010/main" val="73516541"/>
+        <p14:creationId xmlns:p14="http://schemas.microsoft.com/office/powerpoint/2010/main" val="3256780073"/>
       </p:ext>
     </p:extLst>
   </p:cSld>
   <p:clrMap bg1="lt1" tx1="dk1" bg2="lt2" tx2="dk2" accent1="accent1" accent2="accent2" accent3="accent3" accent4="accent4" accent5="accent5" accent6="accent6" hlink="hlink" folHlink="folHlink"/>
   <p:sldLayoutIdLst>
-    <p:sldLayoutId id="2147483697" r:id="rId1"/>
-    <p:sldLayoutId id="2147483698" r:id="rId2"/>
-    <p:sldLayoutId id="2147483699" r:id="rId3"/>
-    <p:sldLayoutId id="2147483700" r:id="rId4"/>
-    <p:sldLayoutId id="2147483701" r:id="rId5"/>
-    <p:sldLayoutId id="2147483702" r:id="rId6"/>
-    <p:sldLayoutId id="2147483703" r:id="rId7"/>
-    <p:sldLayoutId id="2147483704" r:id="rId8"/>
-    <p:sldLayoutId id="2147483705" r:id="rId9"/>
-    <p:sldLayoutId id="2147483706" r:id="rId10"/>
-    <p:sldLayoutId id="2147483707" r:id="rId11"/>
+    <p:sldLayoutId id="2147483733" r:id="rId1"/>
+    <p:sldLayoutId id="2147483734" r:id="rId2"/>
+    <p:sldLayoutId id="2147483735" r:id="rId3"/>
+    <p:sldLayoutId id="2147483736" r:id="rId4"/>
+    <p:sldLayoutId id="2147483737" r:id="rId5"/>
+    <p:sldLayoutId id="2147483738" r:id="rId6"/>
+    <p:sldLayoutId id="2147483739" r:id="rId7"/>
+    <p:sldLayoutId id="2147483740" r:id="rId8"/>
+    <p:sldLayoutId id="2147483741" r:id="rId9"/>
+    <p:sldLayoutId id="2147483742" r:id="rId10"/>
+    <p:sldLayoutId id="2147483743" r:id="rId11"/>
   </p:sldLayoutIdLst>
   <p:txStyles>
     <p:titleStyle>
-      <a:lvl1pPr algn="l" defTabSz="383953" rtl="0" eaLnBrk="1" latinLnBrk="0" hangingPunct="1">
+      <a:lvl1pPr algn="l" defTabSz="432054" rtl="0" eaLnBrk="1" latinLnBrk="0" hangingPunct="1">
         <a:lnSpc>
           <a:spcPct val="90000"/>
         </a:lnSpc>
@@ -2678,7 +2683,7 @@
           <a:spcPct val="0"/>
         </a:spcBef>
         <a:buNone/>
-        <a:defRPr sz="1849" kern="1200">
+        <a:defRPr sz="2079" kern="1200">
           <a:solidFill>
             <a:schemeClr val="tx1"/>
           </a:solidFill>
@@ -2689,16 +2694,16 @@
       </a:lvl1pPr>
     </p:titleStyle>
     <p:bodyStyle>
-      <a:lvl1pPr marL="95988" indent="-95988" algn="l" defTabSz="383953" rtl="0" eaLnBrk="1" latinLnBrk="0" hangingPunct="1">
+      <a:lvl1pPr marL="108014" indent="-108014" algn="l" defTabSz="432054" rtl="0" eaLnBrk="1" latinLnBrk="0" hangingPunct="1">
         <a:lnSpc>
           <a:spcPct val="90000"/>
         </a:lnSpc>
         <a:spcBef>
-          <a:spcPts val="420"/>
+          <a:spcPts val="472"/>
         </a:spcBef>
         <a:buFont typeface="Arial" panose="020B0604020202020204" pitchFamily="34" charset="0"/>
         <a:buChar char="•"/>
-        <a:defRPr sz="1176" kern="1200">
+        <a:defRPr sz="1323" kern="1200">
           <a:solidFill>
             <a:schemeClr val="tx1"/>
           </a:solidFill>
@@ -2707,16 +2712,16 @@
           <a:cs typeface="+mn-cs"/>
         </a:defRPr>
       </a:lvl1pPr>
-      <a:lvl2pPr marL="287965" indent="-95988" algn="l" defTabSz="383953" rtl="0" eaLnBrk="1" latinLnBrk="0" hangingPunct="1">
+      <a:lvl2pPr marL="324041" indent="-108014" algn="l" defTabSz="432054" rtl="0" eaLnBrk="1" latinLnBrk="0" hangingPunct="1">
         <a:lnSpc>
           <a:spcPct val="90000"/>
         </a:lnSpc>
         <a:spcBef>
-          <a:spcPts val="210"/>
+          <a:spcPts val="236"/>
         </a:spcBef>
         <a:buFont typeface="Arial" panose="020B0604020202020204" pitchFamily="34" charset="0"/>
         <a:buChar char="•"/>
-        <a:defRPr sz="1009" kern="1200">
+        <a:defRPr sz="1134" kern="1200">
           <a:solidFill>
             <a:schemeClr val="tx1"/>
           </a:solidFill>
@@ -2725,16 +2730,16 @@
           <a:cs typeface="+mn-cs"/>
         </a:defRPr>
       </a:lvl2pPr>
-      <a:lvl3pPr marL="479942" indent="-95988" algn="l" defTabSz="383953" rtl="0" eaLnBrk="1" latinLnBrk="0" hangingPunct="1">
+      <a:lvl3pPr marL="540068" indent="-108014" algn="l" defTabSz="432054" rtl="0" eaLnBrk="1" latinLnBrk="0" hangingPunct="1">
         <a:lnSpc>
           <a:spcPct val="90000"/>
         </a:lnSpc>
         <a:spcBef>
-          <a:spcPts val="210"/>
+          <a:spcPts val="236"/>
         </a:spcBef>
         <a:buFont typeface="Arial" panose="020B0604020202020204" pitchFamily="34" charset="0"/>
         <a:buChar char="•"/>
-        <a:defRPr sz="840" kern="1200">
+        <a:defRPr sz="945" kern="1200">
           <a:solidFill>
             <a:schemeClr val="tx1"/>
           </a:solidFill>
@@ -2743,16 +2748,16 @@
           <a:cs typeface="+mn-cs"/>
         </a:defRPr>
       </a:lvl3pPr>
-      <a:lvl4pPr marL="671917" indent="-95988" algn="l" defTabSz="383953" rtl="0" eaLnBrk="1" latinLnBrk="0" hangingPunct="1">
+      <a:lvl4pPr marL="756095" indent="-108014" algn="l" defTabSz="432054" rtl="0" eaLnBrk="1" latinLnBrk="0" hangingPunct="1">
         <a:lnSpc>
           <a:spcPct val="90000"/>
         </a:lnSpc>
         <a:spcBef>
-          <a:spcPts val="210"/>
+          <a:spcPts val="236"/>
         </a:spcBef>
         <a:buFont typeface="Arial" panose="020B0604020202020204" pitchFamily="34" charset="0"/>
         <a:buChar char="•"/>
-        <a:defRPr sz="756" kern="1200">
+        <a:defRPr sz="851" kern="1200">
           <a:solidFill>
             <a:schemeClr val="tx1"/>
           </a:solidFill>
@@ -2761,16 +2766,16 @@
           <a:cs typeface="+mn-cs"/>
         </a:defRPr>
       </a:lvl4pPr>
-      <a:lvl5pPr marL="863893" indent="-95988" algn="l" defTabSz="383953" rtl="0" eaLnBrk="1" latinLnBrk="0" hangingPunct="1">
+      <a:lvl5pPr marL="972122" indent="-108014" algn="l" defTabSz="432054" rtl="0" eaLnBrk="1" latinLnBrk="0" hangingPunct="1">
         <a:lnSpc>
           <a:spcPct val="90000"/>
         </a:lnSpc>
         <a:spcBef>
-          <a:spcPts val="210"/>
+          <a:spcPts val="236"/>
         </a:spcBef>
         <a:buFont typeface="Arial" panose="020B0604020202020204" pitchFamily="34" charset="0"/>
         <a:buChar char="•"/>
-        <a:defRPr sz="756" kern="1200">
+        <a:defRPr sz="851" kern="1200">
           <a:solidFill>
             <a:schemeClr val="tx1"/>
           </a:solidFill>
@@ -2779,16 +2784,16 @@
           <a:cs typeface="+mn-cs"/>
         </a:defRPr>
       </a:lvl5pPr>
-      <a:lvl6pPr marL="1055870" indent="-95988" algn="l" defTabSz="383953" rtl="0" eaLnBrk="1" latinLnBrk="0" hangingPunct="1">
+      <a:lvl6pPr marL="1188149" indent="-108014" algn="l" defTabSz="432054" rtl="0" eaLnBrk="1" latinLnBrk="0" hangingPunct="1">
         <a:lnSpc>
           <a:spcPct val="90000"/>
         </a:lnSpc>
         <a:spcBef>
-          <a:spcPts val="210"/>
+          <a:spcPts val="236"/>
         </a:spcBef>
         <a:buFont typeface="Arial" panose="020B0604020202020204" pitchFamily="34" charset="0"/>
         <a:buChar char="•"/>
-        <a:defRPr sz="756" kern="1200">
+        <a:defRPr sz="851" kern="1200">
           <a:solidFill>
             <a:schemeClr val="tx1"/>
           </a:solidFill>
@@ -2797,16 +2802,16 @@
           <a:cs typeface="+mn-cs"/>
         </a:defRPr>
       </a:lvl6pPr>
-      <a:lvl7pPr marL="1247847" indent="-95988" algn="l" defTabSz="383953" rtl="0" eaLnBrk="1" latinLnBrk="0" hangingPunct="1">
+      <a:lvl7pPr marL="1404176" indent="-108014" algn="l" defTabSz="432054" rtl="0" eaLnBrk="1" latinLnBrk="0" hangingPunct="1">
         <a:lnSpc>
           <a:spcPct val="90000"/>
         </a:lnSpc>
         <a:spcBef>
-          <a:spcPts val="210"/>
+          <a:spcPts val="236"/>
         </a:spcBef>
         <a:buFont typeface="Arial" panose="020B0604020202020204" pitchFamily="34" charset="0"/>
         <a:buChar char="•"/>
-        <a:defRPr sz="756" kern="1200">
+        <a:defRPr sz="851" kern="1200">
           <a:solidFill>
             <a:schemeClr val="tx1"/>
           </a:solidFill>
@@ -2815,16 +2820,16 @@
           <a:cs typeface="+mn-cs"/>
         </a:defRPr>
       </a:lvl7pPr>
-      <a:lvl8pPr marL="1439823" indent="-95988" algn="l" defTabSz="383953" rtl="0" eaLnBrk="1" latinLnBrk="0" hangingPunct="1">
+      <a:lvl8pPr marL="1620203" indent="-108014" algn="l" defTabSz="432054" rtl="0" eaLnBrk="1" latinLnBrk="0" hangingPunct="1">
         <a:lnSpc>
           <a:spcPct val="90000"/>
         </a:lnSpc>
         <a:spcBef>
-          <a:spcPts val="210"/>
+          <a:spcPts val="236"/>
         </a:spcBef>
         <a:buFont typeface="Arial" panose="020B0604020202020204" pitchFamily="34" charset="0"/>
         <a:buChar char="•"/>
-        <a:defRPr sz="756" kern="1200">
+        <a:defRPr sz="851" kern="1200">
           <a:solidFill>
             <a:schemeClr val="tx1"/>
           </a:solidFill>
@@ -2833,16 +2838,16 @@
           <a:cs typeface="+mn-cs"/>
         </a:defRPr>
       </a:lvl8pPr>
-      <a:lvl9pPr marL="1631798" indent="-95988" algn="l" defTabSz="383953" rtl="0" eaLnBrk="1" latinLnBrk="0" hangingPunct="1">
+      <a:lvl9pPr marL="1836230" indent="-108014" algn="l" defTabSz="432054" rtl="0" eaLnBrk="1" latinLnBrk="0" hangingPunct="1">
         <a:lnSpc>
           <a:spcPct val="90000"/>
         </a:lnSpc>
         <a:spcBef>
-          <a:spcPts val="210"/>
+          <a:spcPts val="236"/>
         </a:spcBef>
         <a:buFont typeface="Arial" panose="020B0604020202020204" pitchFamily="34" charset="0"/>
         <a:buChar char="•"/>
-        <a:defRPr sz="756" kern="1200">
+        <a:defRPr sz="851" kern="1200">
           <a:solidFill>
             <a:schemeClr val="tx1"/>
           </a:solidFill>
@@ -2856,8 +2861,8 @@
       <a:defPPr>
         <a:defRPr lang="en-US"/>
       </a:defPPr>
-      <a:lvl1pPr marL="0" algn="l" defTabSz="383953" rtl="0" eaLnBrk="1" latinLnBrk="0" hangingPunct="1">
-        <a:defRPr sz="756" kern="1200">
+      <a:lvl1pPr marL="0" algn="l" defTabSz="432054" rtl="0" eaLnBrk="1" latinLnBrk="0" hangingPunct="1">
+        <a:defRPr sz="851" kern="1200">
           <a:solidFill>
             <a:schemeClr val="tx1"/>
           </a:solidFill>
@@ -2866,8 +2871,8 @@
           <a:cs typeface="+mn-cs"/>
         </a:defRPr>
       </a:lvl1pPr>
-      <a:lvl2pPr marL="191975" algn="l" defTabSz="383953" rtl="0" eaLnBrk="1" latinLnBrk="0" hangingPunct="1">
-        <a:defRPr sz="756" kern="1200">
+      <a:lvl2pPr marL="216027" algn="l" defTabSz="432054" rtl="0" eaLnBrk="1" latinLnBrk="0" hangingPunct="1">
+        <a:defRPr sz="851" kern="1200">
           <a:solidFill>
             <a:schemeClr val="tx1"/>
           </a:solidFill>
@@ -2876,8 +2881,8 @@
           <a:cs typeface="+mn-cs"/>
         </a:defRPr>
       </a:lvl2pPr>
-      <a:lvl3pPr marL="383953" algn="l" defTabSz="383953" rtl="0" eaLnBrk="1" latinLnBrk="0" hangingPunct="1">
-        <a:defRPr sz="756" kern="1200">
+      <a:lvl3pPr marL="432054" algn="l" defTabSz="432054" rtl="0" eaLnBrk="1" latinLnBrk="0" hangingPunct="1">
+        <a:defRPr sz="851" kern="1200">
           <a:solidFill>
             <a:schemeClr val="tx1"/>
           </a:solidFill>
@@ -2886,8 +2891,8 @@
           <a:cs typeface="+mn-cs"/>
         </a:defRPr>
       </a:lvl3pPr>
-      <a:lvl4pPr marL="575930" algn="l" defTabSz="383953" rtl="0" eaLnBrk="1" latinLnBrk="0" hangingPunct="1">
-        <a:defRPr sz="756" kern="1200">
+      <a:lvl4pPr marL="648081" algn="l" defTabSz="432054" rtl="0" eaLnBrk="1" latinLnBrk="0" hangingPunct="1">
+        <a:defRPr sz="851" kern="1200">
           <a:solidFill>
             <a:schemeClr val="tx1"/>
           </a:solidFill>
@@ -2896,8 +2901,8 @@
           <a:cs typeface="+mn-cs"/>
         </a:defRPr>
       </a:lvl4pPr>
-      <a:lvl5pPr marL="767905" algn="l" defTabSz="383953" rtl="0" eaLnBrk="1" latinLnBrk="0" hangingPunct="1">
-        <a:defRPr sz="756" kern="1200">
+      <a:lvl5pPr marL="864108" algn="l" defTabSz="432054" rtl="0" eaLnBrk="1" latinLnBrk="0" hangingPunct="1">
+        <a:defRPr sz="851" kern="1200">
           <a:solidFill>
             <a:schemeClr val="tx1"/>
           </a:solidFill>
@@ -2906,8 +2911,8 @@
           <a:cs typeface="+mn-cs"/>
         </a:defRPr>
       </a:lvl5pPr>
-      <a:lvl6pPr marL="959882" algn="l" defTabSz="383953" rtl="0" eaLnBrk="1" latinLnBrk="0" hangingPunct="1">
-        <a:defRPr sz="756" kern="1200">
+      <a:lvl6pPr marL="1080135" algn="l" defTabSz="432054" rtl="0" eaLnBrk="1" latinLnBrk="0" hangingPunct="1">
+        <a:defRPr sz="851" kern="1200">
           <a:solidFill>
             <a:schemeClr val="tx1"/>
           </a:solidFill>
@@ -2916,8 +2921,8 @@
           <a:cs typeface="+mn-cs"/>
         </a:defRPr>
       </a:lvl6pPr>
-      <a:lvl7pPr marL="1151858" algn="l" defTabSz="383953" rtl="0" eaLnBrk="1" latinLnBrk="0" hangingPunct="1">
-        <a:defRPr sz="756" kern="1200">
+      <a:lvl7pPr marL="1296162" algn="l" defTabSz="432054" rtl="0" eaLnBrk="1" latinLnBrk="0" hangingPunct="1">
+        <a:defRPr sz="851" kern="1200">
           <a:solidFill>
             <a:schemeClr val="tx1"/>
           </a:solidFill>
@@ -2926,8 +2931,8 @@
           <a:cs typeface="+mn-cs"/>
         </a:defRPr>
       </a:lvl7pPr>
-      <a:lvl8pPr marL="1343835" algn="l" defTabSz="383953" rtl="0" eaLnBrk="1" latinLnBrk="0" hangingPunct="1">
-        <a:defRPr sz="756" kern="1200">
+      <a:lvl8pPr marL="1512189" algn="l" defTabSz="432054" rtl="0" eaLnBrk="1" latinLnBrk="0" hangingPunct="1">
+        <a:defRPr sz="851" kern="1200">
           <a:solidFill>
             <a:schemeClr val="tx1"/>
           </a:solidFill>
@@ -2936,8 +2941,8 @@
           <a:cs typeface="+mn-cs"/>
         </a:defRPr>
       </a:lvl8pPr>
-      <a:lvl9pPr marL="1535810" algn="l" defTabSz="383953" rtl="0" eaLnBrk="1" latinLnBrk="0" hangingPunct="1">
-        <a:defRPr sz="756" kern="1200">
+      <a:lvl9pPr marL="1728216" algn="l" defTabSz="432054" rtl="0" eaLnBrk="1" latinLnBrk="0" hangingPunct="1">
+        <a:defRPr sz="851" kern="1200">
           <a:solidFill>
             <a:schemeClr val="tx1"/>
           </a:solidFill>
@@ -2982,8 +2987,8 @@
         </p:nvGrpSpPr>
         <p:grpSpPr>
           <a:xfrm>
-            <a:off x="242087" y="-282887"/>
-            <a:ext cx="9055129" cy="3293098"/>
+            <a:off x="-52710" y="-273667"/>
+            <a:ext cx="9995329" cy="3635022"/>
             <a:chOff x="1218633" y="1859809"/>
             <a:chExt cx="9055129" cy="3293098"/>
           </a:xfrm>
@@ -3092,7 +3097,7 @@
               </a:fontRef>
             </p:style>
             <p:txBody>
-              <a:bodyPr rot="0" spcFirstLastPara="0" vertOverflow="overflow" horzOverflow="overflow" vert="horz" wrap="square" lIns="91440" tIns="45720" rIns="91440" bIns="45720" numCol="1" spcCol="0" rtlCol="0" fromWordArt="0" anchor="ctr" anchorCtr="0" forceAA="0" compatLnSpc="1">
+              <a:bodyPr rot="0" spcFirstLastPara="0" vertOverflow="overflow" horzOverflow="overflow" vert="horz" wrap="square" lIns="94955" tIns="47478" rIns="94955" bIns="47478" numCol="1" spcCol="0" rtlCol="0" fromWordArt="0" anchor="ctr" anchorCtr="0" forceAA="0" compatLnSpc="1">
                 <a:prstTxWarp prst="textNoShape">
                   <a:avLst/>
                 </a:prstTxWarp>
@@ -3101,7 +3106,7 @@
               <a:lstStyle/>
               <a:p>
                 <a:pPr algn="ctr"/>
-                <a:endParaRPr lang="zh-TW" altLang="en-US" dirty="0"/>
+                <a:endParaRPr lang="zh-TW" altLang="en-US" sz="2523" dirty="0"/>
               </a:p>
             </p:txBody>
           </p:sp>
@@ -3210,7 +3215,7 @@
               </a:fontRef>
             </p:style>
             <p:txBody>
-              <a:bodyPr rot="0" spcFirstLastPara="0" vertOverflow="overflow" horzOverflow="overflow" vert="horz" wrap="square" lIns="91440" tIns="45720" rIns="91440" bIns="45720" numCol="1" spcCol="0" rtlCol="0" fromWordArt="0" anchor="ctr" anchorCtr="0" forceAA="0" compatLnSpc="1">
+              <a:bodyPr rot="0" spcFirstLastPara="0" vertOverflow="overflow" horzOverflow="overflow" vert="horz" wrap="square" lIns="94955" tIns="47478" rIns="94955" bIns="47478" numCol="1" spcCol="0" rtlCol="0" fromWordArt="0" anchor="ctr" anchorCtr="0" forceAA="0" compatLnSpc="1">
                 <a:prstTxWarp prst="textNoShape">
                   <a:avLst/>
                 </a:prstTxWarp>
@@ -3219,7 +3224,7 @@
               <a:lstStyle/>
               <a:p>
                 <a:pPr algn="ctr"/>
-                <a:endParaRPr lang="zh-TW" altLang="en-US" dirty="0"/>
+                <a:endParaRPr lang="zh-TW" altLang="en-US" sz="2523" dirty="0"/>
               </a:p>
             </p:txBody>
           </p:sp>
